--- a/気象データアカウント.pptx
+++ b/気象データアカウント.pptx
@@ -7,6 +7,10 @@
   <p:sldIdLst>
     <p:sldId id="256" r:id="rId2"/>
     <p:sldId id="257" r:id="rId3"/>
+    <p:sldId id="258" r:id="rId4"/>
+    <p:sldId id="259" r:id="rId5"/>
+    <p:sldId id="260" r:id="rId6"/>
+    <p:sldId id="261" r:id="rId7"/>
   </p:sldIdLst>
   <p:sldSz cx="6858000" cy="9144000" type="screen4x3"/>
   <p:notesSz cx="6858000" cy="9144000"/>
@@ -244,7 +248,7 @@
           <a:p>
             <a:fld id="{BB664975-44FB-4565-87F5-0251F6F0E26F}" type="datetimeFigureOut">
               <a:rPr kumimoji="1" lang="ja-JP" altLang="en-US" smtClean="0"/>
-              <a:t>2026/7/26</a:t>
+              <a:t>2026/7/30</a:t>
             </a:fld>
             <a:endParaRPr kumimoji="1" lang="ja-JP" altLang="en-US"/>
           </a:p>
@@ -446,7 +450,7 @@
           <a:p>
             <a:fld id="{BB664975-44FB-4565-87F5-0251F6F0E26F}" type="datetimeFigureOut">
               <a:rPr kumimoji="1" lang="ja-JP" altLang="en-US" smtClean="0"/>
-              <a:t>2026/7/26</a:t>
+              <a:t>2026/7/30</a:t>
             </a:fld>
             <a:endParaRPr kumimoji="1" lang="ja-JP" altLang="en-US"/>
           </a:p>
@@ -658,7 +662,7 @@
           <a:p>
             <a:fld id="{BB664975-44FB-4565-87F5-0251F6F0E26F}" type="datetimeFigureOut">
               <a:rPr kumimoji="1" lang="ja-JP" altLang="en-US" smtClean="0"/>
-              <a:t>2026/7/26</a:t>
+              <a:t>2026/7/30</a:t>
             </a:fld>
             <a:endParaRPr kumimoji="1" lang="ja-JP" altLang="en-US"/>
           </a:p>
@@ -860,7 +864,7 @@
           <a:p>
             <a:fld id="{BB664975-44FB-4565-87F5-0251F6F0E26F}" type="datetimeFigureOut">
               <a:rPr kumimoji="1" lang="ja-JP" altLang="en-US" smtClean="0"/>
-              <a:t>2026/7/26</a:t>
+              <a:t>2026/7/30</a:t>
             </a:fld>
             <a:endParaRPr kumimoji="1" lang="ja-JP" altLang="en-US"/>
           </a:p>
@@ -1104,7 +1108,7 @@
           <a:p>
             <a:fld id="{BB664975-44FB-4565-87F5-0251F6F0E26F}" type="datetimeFigureOut">
               <a:rPr kumimoji="1" lang="ja-JP" altLang="en-US" smtClean="0"/>
-              <a:t>2026/7/26</a:t>
+              <a:t>2026/7/30</a:t>
             </a:fld>
             <a:endParaRPr kumimoji="1" lang="ja-JP" altLang="en-US"/>
           </a:p>
@@ -1400,7 +1404,7 @@
           <a:p>
             <a:fld id="{BB664975-44FB-4565-87F5-0251F6F0E26F}" type="datetimeFigureOut">
               <a:rPr kumimoji="1" lang="ja-JP" altLang="en-US" smtClean="0"/>
-              <a:t>2026/7/26</a:t>
+              <a:t>2026/7/30</a:t>
             </a:fld>
             <a:endParaRPr kumimoji="1" lang="ja-JP" altLang="en-US"/>
           </a:p>
@@ -1831,7 +1835,7 @@
           <a:p>
             <a:fld id="{BB664975-44FB-4565-87F5-0251F6F0E26F}" type="datetimeFigureOut">
               <a:rPr kumimoji="1" lang="ja-JP" altLang="en-US" smtClean="0"/>
-              <a:t>2026/7/26</a:t>
+              <a:t>2026/7/30</a:t>
             </a:fld>
             <a:endParaRPr kumimoji="1" lang="ja-JP" altLang="en-US"/>
           </a:p>
@@ -1949,7 +1953,7 @@
           <a:p>
             <a:fld id="{BB664975-44FB-4565-87F5-0251F6F0E26F}" type="datetimeFigureOut">
               <a:rPr kumimoji="1" lang="ja-JP" altLang="en-US" smtClean="0"/>
-              <a:t>2026/7/26</a:t>
+              <a:t>2026/7/30</a:t>
             </a:fld>
             <a:endParaRPr kumimoji="1" lang="ja-JP" altLang="en-US"/>
           </a:p>
@@ -2044,7 +2048,7 @@
           <a:p>
             <a:fld id="{BB664975-44FB-4565-87F5-0251F6F0E26F}" type="datetimeFigureOut">
               <a:rPr kumimoji="1" lang="ja-JP" altLang="en-US" smtClean="0"/>
-              <a:t>2026/7/26</a:t>
+              <a:t>2026/7/30</a:t>
             </a:fld>
             <a:endParaRPr kumimoji="1" lang="ja-JP" altLang="en-US"/>
           </a:p>
@@ -2353,7 +2357,7 @@
           <a:p>
             <a:fld id="{BB664975-44FB-4565-87F5-0251F6F0E26F}" type="datetimeFigureOut">
               <a:rPr kumimoji="1" lang="ja-JP" altLang="en-US" smtClean="0"/>
-              <a:t>2026/7/26</a:t>
+              <a:t>2026/7/30</a:t>
             </a:fld>
             <a:endParaRPr kumimoji="1" lang="ja-JP" altLang="en-US"/>
           </a:p>
@@ -2610,7 +2614,7 @@
           <a:p>
             <a:fld id="{BB664975-44FB-4565-87F5-0251F6F0E26F}" type="datetimeFigureOut">
               <a:rPr kumimoji="1" lang="ja-JP" altLang="en-US" smtClean="0"/>
-              <a:t>2026/7/26</a:t>
+              <a:t>2026/7/30</a:t>
             </a:fld>
             <a:endParaRPr kumimoji="1" lang="ja-JP" altLang="en-US"/>
           </a:p>
@@ -2855,7 +2859,7 @@
           <a:p>
             <a:fld id="{BB664975-44FB-4565-87F5-0251F6F0E26F}" type="datetimeFigureOut">
               <a:rPr kumimoji="1" lang="ja-JP" altLang="en-US" smtClean="0"/>
-              <a:t>2026/7/26</a:t>
+              <a:t>2026/7/30</a:t>
             </a:fld>
             <a:endParaRPr kumimoji="1" lang="ja-JP" altLang="en-US"/>
           </a:p>
@@ -3519,6 +3523,583 @@
 </p:sld>
 </file>
 
+<file path=ppt/slides/slide3.xml><?xml version="1.0" encoding="utf-8"?>
+<p:sld xmlns:a="http://schemas.openxmlformats.org/drawingml/2006/main" xmlns:r="http://schemas.openxmlformats.org/officeDocument/2006/relationships" xmlns:p="http://schemas.openxmlformats.org/presentationml/2006/main">
+  <p:cSld>
+    <p:spTree>
+      <p:nvGrpSpPr>
+        <p:cNvPr id="1" name=""/>
+        <p:cNvGrpSpPr/>
+        <p:nvPr/>
+      </p:nvGrpSpPr>
+      <p:grpSpPr>
+        <a:xfrm>
+          <a:off x="0" y="0"/>
+          <a:ext cx="0" cy="0"/>
+          <a:chOff x="0" y="0"/>
+          <a:chExt cx="0" cy="0"/>
+        </a:xfrm>
+      </p:grpSpPr>
+      <p:pic>
+        <p:nvPicPr>
+          <p:cNvPr id="5" name="図 4">
+            <a:extLst>
+              <a:ext uri="{FF2B5EF4-FFF2-40B4-BE49-F238E27FC236}">
+                <a16:creationId xmlns:a16="http://schemas.microsoft.com/office/drawing/2014/main" id="{6F145173-FD35-F3B0-D70A-C3DA14E9694A}"/>
+              </a:ext>
+            </a:extLst>
+          </p:cNvPr>
+          <p:cNvPicPr>
+            <a:picLocks noChangeAspect="1"/>
+          </p:cNvPicPr>
+          <p:nvPr/>
+        </p:nvPicPr>
+        <p:blipFill>
+          <a:blip r:embed="rId2"/>
+          <a:stretch>
+            <a:fillRect/>
+          </a:stretch>
+        </p:blipFill>
+        <p:spPr>
+          <a:xfrm>
+            <a:off x="332013" y="220209"/>
+            <a:ext cx="5453743" cy="3080637"/>
+          </a:xfrm>
+          <a:prstGeom prst="rect">
+            <a:avLst/>
+          </a:prstGeom>
+        </p:spPr>
+      </p:pic>
+      <p:pic>
+        <p:nvPicPr>
+          <p:cNvPr id="7" name="図 6">
+            <a:extLst>
+              <a:ext uri="{FF2B5EF4-FFF2-40B4-BE49-F238E27FC236}">
+                <a16:creationId xmlns:a16="http://schemas.microsoft.com/office/drawing/2014/main" id="{F4F4BA98-10D0-7625-C3E0-714A9BE8A6F9}"/>
+              </a:ext>
+            </a:extLst>
+          </p:cNvPr>
+          <p:cNvPicPr>
+            <a:picLocks noChangeAspect="1"/>
+          </p:cNvPicPr>
+          <p:nvPr/>
+        </p:nvPicPr>
+        <p:blipFill>
+          <a:blip r:embed="rId3"/>
+          <a:stretch>
+            <a:fillRect/>
+          </a:stretch>
+        </p:blipFill>
+        <p:spPr>
+          <a:xfrm>
+            <a:off x="332013" y="3415157"/>
+            <a:ext cx="6858000" cy="2313686"/>
+          </a:xfrm>
+          <a:prstGeom prst="rect">
+            <a:avLst/>
+          </a:prstGeom>
+        </p:spPr>
+      </p:pic>
+      <p:pic>
+        <p:nvPicPr>
+          <p:cNvPr id="9" name="図 8">
+            <a:extLst>
+              <a:ext uri="{FF2B5EF4-FFF2-40B4-BE49-F238E27FC236}">
+                <a16:creationId xmlns:a16="http://schemas.microsoft.com/office/drawing/2014/main" id="{7D980384-B94C-FBE1-83AC-585A13788FC6}"/>
+              </a:ext>
+            </a:extLst>
+          </p:cNvPr>
+          <p:cNvPicPr>
+            <a:picLocks noChangeAspect="1"/>
+          </p:cNvPicPr>
+          <p:nvPr/>
+        </p:nvPicPr>
+        <p:blipFill>
+          <a:blip r:embed="rId4"/>
+          <a:stretch>
+            <a:fillRect/>
+          </a:stretch>
+        </p:blipFill>
+        <p:spPr>
+          <a:xfrm>
+            <a:off x="527956" y="5667530"/>
+            <a:ext cx="5638800" cy="2655041"/>
+          </a:xfrm>
+          <a:prstGeom prst="rect">
+            <a:avLst/>
+          </a:prstGeom>
+        </p:spPr>
+      </p:pic>
+      <p:sp>
+        <p:nvSpPr>
+          <p:cNvPr id="10" name="テキスト ボックス 9">
+            <a:extLst>
+              <a:ext uri="{FF2B5EF4-FFF2-40B4-BE49-F238E27FC236}">
+                <a16:creationId xmlns:a16="http://schemas.microsoft.com/office/drawing/2014/main" id="{F522EEE1-77BD-A3DF-6FEF-042F7228BE96}"/>
+              </a:ext>
+            </a:extLst>
+          </p:cNvPr>
+          <p:cNvSpPr txBox="1"/>
+          <p:nvPr/>
+        </p:nvSpPr>
+        <p:spPr>
+          <a:xfrm>
+            <a:off x="729343" y="8665029"/>
+            <a:ext cx="2954655" cy="369332"/>
+          </a:xfrm>
+          <a:prstGeom prst="rect">
+            <a:avLst/>
+          </a:prstGeom>
+          <a:noFill/>
+        </p:spPr>
+        <p:txBody>
+          <a:bodyPr wrap="none" rtlCol="0">
+            <a:spAutoFit/>
+          </a:bodyPr>
+          <a:lstStyle/>
+          <a:p>
+            <a:r>
+              <a:rPr kumimoji="1" lang="ja-JP" altLang="en-US" dirty="0"/>
+              <a:t>プロバイダー名：おくやみ</a:t>
+            </a:r>
+          </a:p>
+        </p:txBody>
+      </p:sp>
+      <p:sp>
+        <p:nvSpPr>
+          <p:cNvPr id="12" name="テキスト ボックス 11">
+            <a:extLst>
+              <a:ext uri="{FF2B5EF4-FFF2-40B4-BE49-F238E27FC236}">
+                <a16:creationId xmlns:a16="http://schemas.microsoft.com/office/drawing/2014/main" id="{3AB5C9E8-7E1A-AB31-66C6-1166999C5389}"/>
+              </a:ext>
+            </a:extLst>
+          </p:cNvPr>
+          <p:cNvSpPr txBox="1"/>
+          <p:nvPr/>
+        </p:nvSpPr>
+        <p:spPr>
+          <a:xfrm>
+            <a:off x="7015845" y="6549299"/>
+            <a:ext cx="5851068" cy="1477328"/>
+          </a:xfrm>
+          <a:prstGeom prst="rect">
+            <a:avLst/>
+          </a:prstGeom>
+          <a:noFill/>
+        </p:spPr>
+        <p:txBody>
+          <a:bodyPr wrap="square">
+            <a:spAutoFit/>
+          </a:bodyPr>
+          <a:lstStyle/>
+          <a:p>
+            <a:r>
+              <a:rPr lang="ja-JP" altLang="en-US" dirty="0"/>
+              <a:t>ステータス</a:t>
+            </a:r>
+          </a:p>
+          <a:p>
+            <a:r>
+              <a:rPr lang="ja-JP" altLang="en-US" dirty="0"/>
+              <a:t>利用中</a:t>
+            </a:r>
+          </a:p>
+          <a:p>
+            <a:r>
+              <a:rPr lang="en-US" altLang="ja-JP" dirty="0"/>
+              <a:t>Channel</a:t>
+            </a:r>
+            <a:r>
+              <a:rPr lang="ja-JP" altLang="en-US" dirty="0"/>
+              <a:t>情報</a:t>
+            </a:r>
+          </a:p>
+          <a:p>
+            <a:r>
+              <a:rPr lang="en-US" altLang="ja-JP" dirty="0"/>
+              <a:t>Channel ID</a:t>
+            </a:r>
+            <a:r>
+              <a:rPr lang="ja-JP" altLang="en-US" dirty="0"/>
+              <a:t>　　　</a:t>
+            </a:r>
+            <a:r>
+              <a:rPr lang="en-US" altLang="ja-JP" dirty="0"/>
+              <a:t>2010900953</a:t>
+            </a:r>
+          </a:p>
+          <a:p>
+            <a:r>
+              <a:rPr lang="en-US" altLang="ja-JP" dirty="0"/>
+              <a:t>Channel secret</a:t>
+            </a:r>
+            <a:r>
+              <a:rPr lang="ja-JP" altLang="en-US" dirty="0"/>
+              <a:t>　　　</a:t>
+            </a:r>
+            <a:r>
+              <a:rPr lang="en-US" altLang="ja-JP" dirty="0"/>
+              <a:t>5f6a2808ce87b3b62e9ec9194f918822</a:t>
+            </a:r>
+            <a:endParaRPr lang="ja-JP" altLang="en-US" dirty="0"/>
+          </a:p>
+        </p:txBody>
+      </p:sp>
+      <p:pic>
+        <p:nvPicPr>
+          <p:cNvPr id="14" name="図 13">
+            <a:extLst>
+              <a:ext uri="{FF2B5EF4-FFF2-40B4-BE49-F238E27FC236}">
+                <a16:creationId xmlns:a16="http://schemas.microsoft.com/office/drawing/2014/main" id="{4E36A2F4-B343-4AD4-CF26-CB05ED407285}"/>
+              </a:ext>
+            </a:extLst>
+          </p:cNvPr>
+          <p:cNvPicPr>
+            <a:picLocks noChangeAspect="1"/>
+          </p:cNvPicPr>
+          <p:nvPr/>
+        </p:nvPicPr>
+        <p:blipFill>
+          <a:blip r:embed="rId5"/>
+          <a:stretch>
+            <a:fillRect/>
+          </a:stretch>
+        </p:blipFill>
+        <p:spPr>
+          <a:xfrm>
+            <a:off x="7576457" y="2584477"/>
+            <a:ext cx="6858000" cy="3083053"/>
+          </a:xfrm>
+          <a:prstGeom prst="rect">
+            <a:avLst/>
+          </a:prstGeom>
+        </p:spPr>
+      </p:pic>
+    </p:spTree>
+    <p:extLst>
+      <p:ext uri="{BB962C8B-B14F-4D97-AF65-F5344CB8AC3E}">
+        <p14:creationId xmlns:p14="http://schemas.microsoft.com/office/powerpoint/2010/main" val="1440577105"/>
+      </p:ext>
+    </p:extLst>
+  </p:cSld>
+  <p:clrMapOvr>
+    <a:masterClrMapping/>
+  </p:clrMapOvr>
+</p:sld>
+</file>
+
+<file path=ppt/slides/slide4.xml><?xml version="1.0" encoding="utf-8"?>
+<p:sld xmlns:a="http://schemas.openxmlformats.org/drawingml/2006/main" xmlns:r="http://schemas.openxmlformats.org/officeDocument/2006/relationships" xmlns:p="http://schemas.openxmlformats.org/presentationml/2006/main">
+  <p:cSld>
+    <p:spTree>
+      <p:nvGrpSpPr>
+        <p:cNvPr id="1" name=""/>
+        <p:cNvGrpSpPr/>
+        <p:nvPr/>
+      </p:nvGrpSpPr>
+      <p:grpSpPr>
+        <a:xfrm>
+          <a:off x="0" y="0"/>
+          <a:ext cx="0" cy="0"/>
+          <a:chOff x="0" y="0"/>
+          <a:chExt cx="0" cy="0"/>
+        </a:xfrm>
+      </p:grpSpPr>
+      <p:sp>
+        <p:nvSpPr>
+          <p:cNvPr id="5" name="テキスト ボックス 4">
+            <a:extLst>
+              <a:ext uri="{FF2B5EF4-FFF2-40B4-BE49-F238E27FC236}">
+                <a16:creationId xmlns:a16="http://schemas.microsoft.com/office/drawing/2014/main" id="{ACD65010-7114-1082-4B1A-C5B4528EE5DB}"/>
+              </a:ext>
+            </a:extLst>
+          </p:cNvPr>
+          <p:cNvSpPr txBox="1"/>
+          <p:nvPr/>
+        </p:nvSpPr>
+        <p:spPr>
+          <a:xfrm>
+            <a:off x="957943" y="1059321"/>
+            <a:ext cx="4196443" cy="369332"/>
+          </a:xfrm>
+          <a:prstGeom prst="rect">
+            <a:avLst/>
+          </a:prstGeom>
+          <a:noFill/>
+        </p:spPr>
+        <p:txBody>
+          <a:bodyPr wrap="square">
+            <a:spAutoFit/>
+          </a:bodyPr>
+          <a:lstStyle/>
+          <a:p>
+            <a:r>
+              <a:rPr lang="en-US" altLang="ja-JP" dirty="0"/>
+              <a:t>5f6a2808ce87b3b62e9ec9194f918822</a:t>
+            </a:r>
+            <a:endParaRPr lang="ja-JP" altLang="en-US" dirty="0"/>
+          </a:p>
+        </p:txBody>
+      </p:sp>
+      <p:pic>
+        <p:nvPicPr>
+          <p:cNvPr id="7" name="図 6">
+            <a:extLst>
+              <a:ext uri="{FF2B5EF4-FFF2-40B4-BE49-F238E27FC236}">
+                <a16:creationId xmlns:a16="http://schemas.microsoft.com/office/drawing/2014/main" id="{E47188FB-0C86-FC88-FACE-4CF49FD9CE10}"/>
+              </a:ext>
+            </a:extLst>
+          </p:cNvPr>
+          <p:cNvPicPr>
+            <a:picLocks noChangeAspect="1"/>
+          </p:cNvPicPr>
+          <p:nvPr/>
+        </p:nvPicPr>
+        <p:blipFill>
+          <a:blip r:embed="rId2"/>
+          <a:stretch>
+            <a:fillRect/>
+          </a:stretch>
+        </p:blipFill>
+        <p:spPr>
+          <a:xfrm>
+            <a:off x="-108857" y="2045615"/>
+            <a:ext cx="6858000" cy="2374884"/>
+          </a:xfrm>
+          <a:prstGeom prst="rect">
+            <a:avLst/>
+          </a:prstGeom>
+        </p:spPr>
+      </p:pic>
+      <p:sp>
+        <p:nvSpPr>
+          <p:cNvPr id="10" name="テキスト ボックス 9">
+            <a:extLst>
+              <a:ext uri="{FF2B5EF4-FFF2-40B4-BE49-F238E27FC236}">
+                <a16:creationId xmlns:a16="http://schemas.microsoft.com/office/drawing/2014/main" id="{4D8E9600-DF46-468E-B994-C15CD4165B47}"/>
+              </a:ext>
+            </a:extLst>
+          </p:cNvPr>
+          <p:cNvSpPr txBox="1"/>
+          <p:nvPr/>
+        </p:nvSpPr>
+        <p:spPr>
+          <a:xfrm>
+            <a:off x="220435" y="5344059"/>
+            <a:ext cx="6528708" cy="1754326"/>
+          </a:xfrm>
+          <a:prstGeom prst="rect">
+            <a:avLst/>
+          </a:prstGeom>
+          <a:noFill/>
+        </p:spPr>
+        <p:txBody>
+          <a:bodyPr wrap="square">
+            <a:spAutoFit/>
+          </a:bodyPr>
+          <a:lstStyle/>
+          <a:p>
+            <a:r>
+              <a:rPr lang="ja-JP" altLang="en-US" dirty="0"/>
+              <a:t>チャネルアクセストークン</a:t>
+            </a:r>
+          </a:p>
+          <a:p>
+            <a:r>
+              <a:rPr lang="ja-JP" altLang="en-US" dirty="0"/>
+              <a:t>チャネルアクセストークン（長期） </a:t>
+            </a:r>
+          </a:p>
+          <a:p>
+            <a:r>
+              <a:rPr lang="en-US" altLang="ja-JP" dirty="0"/>
+              <a:t>0dQF80MvqDHrto7QUqTYJ6V+NXB+1S9tZ1L3+z+Jrs+ZkM2XpZVTUeoddO4gWyZaNnckQ81si/YJBR6LcFXoRb5LOCIzUE59kHYYiZfL/++qDlaioLnCMCkcpslo5oQy4F2HrdnnIpYSXeLNaVgzMwdB04t89/1O/w1cDnyilFU=</a:t>
+            </a:r>
+            <a:endParaRPr lang="ja-JP" altLang="en-US" dirty="0"/>
+          </a:p>
+        </p:txBody>
+      </p:sp>
+      <p:sp>
+        <p:nvSpPr>
+          <p:cNvPr id="11" name="テキスト ボックス 10">
+            <a:extLst>
+              <a:ext uri="{FF2B5EF4-FFF2-40B4-BE49-F238E27FC236}">
+                <a16:creationId xmlns:a16="http://schemas.microsoft.com/office/drawing/2014/main" id="{4B96B100-5732-F706-E438-BE6DF01FE445}"/>
+              </a:ext>
+            </a:extLst>
+          </p:cNvPr>
+          <p:cNvSpPr txBox="1"/>
+          <p:nvPr/>
+        </p:nvSpPr>
+        <p:spPr>
+          <a:xfrm>
+            <a:off x="1194855" y="4572000"/>
+            <a:ext cx="2310248" cy="246221"/>
+          </a:xfrm>
+          <a:prstGeom prst="rect">
+            <a:avLst/>
+          </a:prstGeom>
+          <a:noFill/>
+        </p:spPr>
+        <p:txBody>
+          <a:bodyPr wrap="none" rtlCol="0">
+            <a:spAutoFit/>
+          </a:bodyPr>
+          <a:lstStyle/>
+          <a:p>
+            <a:r>
+              <a:rPr kumimoji="1" lang="en-US" altLang="ja-JP" sz="1000" dirty="0"/>
+              <a:t>Ub8ba55ba82451f1659e16fddb752e60e</a:t>
+            </a:r>
+            <a:endParaRPr kumimoji="1" lang="ja-JP" altLang="en-US" sz="1000" dirty="0"/>
+          </a:p>
+        </p:txBody>
+      </p:sp>
+    </p:spTree>
+    <p:extLst>
+      <p:ext uri="{BB962C8B-B14F-4D97-AF65-F5344CB8AC3E}">
+        <p14:creationId xmlns:p14="http://schemas.microsoft.com/office/powerpoint/2010/main" val="883810448"/>
+      </p:ext>
+    </p:extLst>
+  </p:cSld>
+  <p:clrMapOvr>
+    <a:masterClrMapping/>
+  </p:clrMapOvr>
+</p:sld>
+</file>
+
+<file path=ppt/slides/slide5.xml><?xml version="1.0" encoding="utf-8"?>
+<p:sld xmlns:a="http://schemas.openxmlformats.org/drawingml/2006/main" xmlns:r="http://schemas.openxmlformats.org/officeDocument/2006/relationships" xmlns:p="http://schemas.openxmlformats.org/presentationml/2006/main">
+  <p:cSld>
+    <p:spTree>
+      <p:nvGrpSpPr>
+        <p:cNvPr id="1" name=""/>
+        <p:cNvGrpSpPr/>
+        <p:nvPr/>
+      </p:nvGrpSpPr>
+      <p:grpSpPr>
+        <a:xfrm>
+          <a:off x="0" y="0"/>
+          <a:ext cx="0" cy="0"/>
+          <a:chOff x="0" y="0"/>
+          <a:chExt cx="0" cy="0"/>
+        </a:xfrm>
+      </p:grpSpPr>
+      <p:sp>
+        <p:nvSpPr>
+          <p:cNvPr id="5" name="テキスト ボックス 4">
+            <a:extLst>
+              <a:ext uri="{FF2B5EF4-FFF2-40B4-BE49-F238E27FC236}">
+                <a16:creationId xmlns:a16="http://schemas.microsoft.com/office/drawing/2014/main" id="{5E4718FC-117C-C5E3-CEFD-8C3559B6182C}"/>
+              </a:ext>
+            </a:extLst>
+          </p:cNvPr>
+          <p:cNvSpPr txBox="1"/>
+          <p:nvPr/>
+        </p:nvSpPr>
+        <p:spPr>
+          <a:xfrm>
+            <a:off x="914400" y="2552011"/>
+            <a:ext cx="4326902" cy="369332"/>
+          </a:xfrm>
+          <a:prstGeom prst="rect">
+            <a:avLst/>
+          </a:prstGeom>
+          <a:noFill/>
+        </p:spPr>
+        <p:txBody>
+          <a:bodyPr wrap="square">
+            <a:spAutoFit/>
+          </a:bodyPr>
+          <a:lstStyle/>
+          <a:p>
+            <a:r>
+              <a:rPr lang="en-US" altLang="ja-JP" dirty="0"/>
+              <a:t>122d4bbcf29197b657418f48a6e93e52</a:t>
+            </a:r>
+            <a:endParaRPr lang="ja-JP" altLang="en-US" dirty="0"/>
+          </a:p>
+        </p:txBody>
+      </p:sp>
+      <p:pic>
+        <p:nvPicPr>
+          <p:cNvPr id="7" name="図 6">
+            <a:extLst>
+              <a:ext uri="{FF2B5EF4-FFF2-40B4-BE49-F238E27FC236}">
+                <a16:creationId xmlns:a16="http://schemas.microsoft.com/office/drawing/2014/main" id="{BE38D011-EE13-41E5-22D1-1660F3B41F1D}"/>
+              </a:ext>
+            </a:extLst>
+          </p:cNvPr>
+          <p:cNvPicPr>
+            <a:picLocks noChangeAspect="1"/>
+          </p:cNvPicPr>
+          <p:nvPr/>
+        </p:nvPicPr>
+        <p:blipFill>
+          <a:blip r:embed="rId2"/>
+          <a:stretch>
+            <a:fillRect/>
+          </a:stretch>
+        </p:blipFill>
+        <p:spPr>
+          <a:xfrm>
+            <a:off x="603316" y="162132"/>
+            <a:ext cx="5835192" cy="2182489"/>
+          </a:xfrm>
+          <a:prstGeom prst="rect">
+            <a:avLst/>
+          </a:prstGeom>
+        </p:spPr>
+      </p:pic>
+    </p:spTree>
+    <p:extLst>
+      <p:ext uri="{BB962C8B-B14F-4D97-AF65-F5344CB8AC3E}">
+        <p14:creationId xmlns:p14="http://schemas.microsoft.com/office/powerpoint/2010/main" val="835137933"/>
+      </p:ext>
+    </p:extLst>
+  </p:cSld>
+  <p:clrMapOvr>
+    <a:masterClrMapping/>
+  </p:clrMapOvr>
+</p:sld>
+</file>
+
+<file path=ppt/slides/slide6.xml><?xml version="1.0" encoding="utf-8"?>
+<p:sld xmlns:a="http://schemas.openxmlformats.org/drawingml/2006/main" xmlns:r="http://schemas.openxmlformats.org/officeDocument/2006/relationships" xmlns:p="http://schemas.openxmlformats.org/presentationml/2006/main">
+  <p:cSld>
+    <p:spTree>
+      <p:nvGrpSpPr>
+        <p:cNvPr id="1" name="">
+          <a:extLst>
+            <a:ext uri="{FF2B5EF4-FFF2-40B4-BE49-F238E27FC236}">
+              <a16:creationId xmlns:a16="http://schemas.microsoft.com/office/drawing/2014/main" id="{FDC85856-1979-B543-DA61-7C1E1E6CB9B1}"/>
+            </a:ext>
+          </a:extLst>
+        </p:cNvPr>
+        <p:cNvGrpSpPr/>
+        <p:nvPr/>
+      </p:nvGrpSpPr>
+      <p:grpSpPr>
+        <a:xfrm>
+          <a:off x="0" y="0"/>
+          <a:ext cx="0" cy="0"/>
+          <a:chOff x="0" y="0"/>
+          <a:chExt cx="0" cy="0"/>
+        </a:xfrm>
+      </p:grpSpPr>
+    </p:spTree>
+    <p:extLst>
+      <p:ext uri="{BB962C8B-B14F-4D97-AF65-F5344CB8AC3E}">
+        <p14:creationId xmlns:p14="http://schemas.microsoft.com/office/powerpoint/2010/main" val="367458859"/>
+      </p:ext>
+    </p:extLst>
+  </p:cSld>
+  <p:clrMapOvr>
+    <a:masterClrMapping/>
+  </p:clrMapOvr>
+</p:sld>
+</file>
+
 <file path=ppt/theme/theme1.xml><?xml version="1.0" encoding="utf-8"?>
 <a:theme xmlns:a="http://schemas.openxmlformats.org/drawingml/2006/main" name="Office テーマ">
   <a:themeElements>
